--- a/Presentation.pptx
+++ b/Presentation.pptx
@@ -11,6 +11,7 @@
     <p:sldId id="260" r:id="rId5"/>
     <p:sldId id="258" r:id="rId6"/>
     <p:sldId id="259" r:id="rId7"/>
+    <p:sldId id="262" r:id="rId8"/>
   </p:sldIdLst>
   <p:sldSz cx="12192000" cy="6858000"/>
   <p:notesSz cx="6858000" cy="9144000"/>
@@ -116,7 +117,8 @@
 <p1510:revInfo xmlns:a="http://schemas.openxmlformats.org/drawingml/2006/main" xmlns:r="http://schemas.openxmlformats.org/officeDocument/2006/relationships" xmlns:p1510="http://schemas.microsoft.com/office/powerpoint/2015/10/main">
   <p1510:revLst>
     <p1510:client id="{6BC399FF-FEDF-7C09-AD08-FF33601232FC}" v="2" dt="2026-01-30T06:01:33.432"/>
-    <p1510:client id="{B0BA3F97-B752-731E-4E2F-878AF86A828F}" v="152" dt="2026-01-30T06:09:35.398"/>
+    <p1510:client id="{7E2A5F9C-5978-9A0E-20B1-979667C1ABC5}" v="2" dt="2026-01-30T06:42:47.476"/>
+    <p1510:client id="{B0BA3F97-B752-731E-4E2F-878AF86A828F}" v="180" dt="2026-01-30T06:41:18.891"/>
     <p1510:client id="{D05E770A-9601-A750-DFED-F4F69723B8FD}" v="47" dt="2026-01-30T03:17:31.296"/>
     <p1510:client id="{FDFAAF75-000C-F2F9-1CDA-D1DC6FEA3CF3}" v="10" dt="2026-01-30T04:28:16.025"/>
   </p1510:revLst>
@@ -3769,6 +3771,276 @@
 </p:sld>
 </file>
 
+<file path=ppt/slides/slide7.xml><?xml version="1.0" encoding="utf-8"?>
+<p:sld xmlns:a="http://schemas.openxmlformats.org/drawingml/2006/main" xmlns:r="http://schemas.openxmlformats.org/officeDocument/2006/relationships" xmlns:p="http://schemas.openxmlformats.org/presentationml/2006/main">
+  <p:cSld>
+    <p:spTree>
+      <p:nvGrpSpPr>
+        <p:cNvPr id="1" name=""/>
+        <p:cNvGrpSpPr/>
+        <p:nvPr/>
+      </p:nvGrpSpPr>
+      <p:grpSpPr>
+        <a:xfrm>
+          <a:off x="0" y="0"/>
+          <a:ext cx="0" cy="0"/>
+          <a:chOff x="0" y="0"/>
+          <a:chExt cx="0" cy="0"/>
+        </a:xfrm>
+      </p:grpSpPr>
+      <p:sp>
+        <p:nvSpPr>
+          <p:cNvPr id="2" name="Title 1">
+            <a:extLst>
+              <a:ext uri="{FF2B5EF4-FFF2-40B4-BE49-F238E27FC236}">
+                <a16:creationId xmlns:a16="http://schemas.microsoft.com/office/drawing/2014/main" id="{4CCE28D2-FC28-F2F0-80A7-C0A7BD4B3159}"/>
+              </a:ext>
+            </a:extLst>
+          </p:cNvPr>
+          <p:cNvSpPr>
+            <a:spLocks noGrp="1"/>
+          </p:cNvSpPr>
+          <p:nvPr>
+            <p:ph type="title"/>
+          </p:nvPr>
+        </p:nvSpPr>
+        <p:spPr/>
+        <p:txBody>
+          <a:bodyPr>
+            <a:normAutofit/>
+          </a:bodyPr>
+          <a:lstStyle/>
+          <a:p>
+            <a:r>
+              <a:rPr lang="en-US" sz="4000">
+                <a:latin typeface="Times New Roman"/>
+                <a:ea typeface="+mj-lt"/>
+                <a:cs typeface="+mj-lt"/>
+              </a:rPr>
+              <a:t>App Logic Explained with a Football Analogy</a:t>
+            </a:r>
+            <a:endParaRPr lang="en-US" sz="4000">
+              <a:latin typeface="Times New Roman"/>
+              <a:cs typeface="Times New Roman"/>
+            </a:endParaRPr>
+          </a:p>
+        </p:txBody>
+      </p:sp>
+      <p:sp>
+        <p:nvSpPr>
+          <p:cNvPr id="3" name="Content Placeholder 2">
+            <a:extLst>
+              <a:ext uri="{FF2B5EF4-FFF2-40B4-BE49-F238E27FC236}">
+                <a16:creationId xmlns:a16="http://schemas.microsoft.com/office/drawing/2014/main" id="{C520C201-14FF-798C-97C9-67EED9124896}"/>
+              </a:ext>
+            </a:extLst>
+          </p:cNvPr>
+          <p:cNvSpPr>
+            <a:spLocks noGrp="1"/>
+          </p:cNvSpPr>
+          <p:nvPr>
+            <p:ph idx="1"/>
+          </p:nvPr>
+        </p:nvSpPr>
+        <p:spPr/>
+        <p:txBody>
+          <a:bodyPr vert="horz" lIns="91440" tIns="45720" rIns="91440" bIns="45720" rtlCol="0" anchor="t">
+            <a:normAutofit/>
+          </a:bodyPr>
+          <a:lstStyle/>
+          <a:p>
+            <a:r>
+              <a:rPr lang="en-US" sz="1600" b="1" dirty="0">
+                <a:latin typeface="Times New Roman"/>
+                <a:ea typeface="+mn-lt"/>
+                <a:cs typeface="+mn-lt"/>
+              </a:rPr>
+              <a:t>General Manager = Top-Level Objective</a:t>
+            </a:r>
+            <a:br>
+              <a:rPr lang="en-US" sz="1600" b="1" dirty="0">
+                <a:latin typeface="Times New Roman"/>
+                <a:ea typeface="+mn-lt"/>
+                <a:cs typeface="+mn-lt"/>
+              </a:rPr>
+            </a:br>
+            <a:r>
+              <a:rPr lang="en-US" sz="1600" dirty="0">
+                <a:latin typeface="Times New Roman"/>
+                <a:ea typeface="+mn-lt"/>
+                <a:cs typeface="+mn-lt"/>
+              </a:rPr>
+              <a:t>The General Manager sets the main goal (e.g., </a:t>
+            </a:r>
+            <a:r>
+              <a:rPr lang="en-US" sz="1600" i="1" dirty="0">
+                <a:latin typeface="Times New Roman"/>
+                <a:ea typeface="+mn-lt"/>
+                <a:cs typeface="+mn-lt"/>
+              </a:rPr>
+              <a:t>Win the Super Bowl</a:t>
+            </a:r>
+            <a:r>
+              <a:rPr lang="en-US" sz="1600" dirty="0">
+                <a:latin typeface="Times New Roman"/>
+                <a:ea typeface="+mn-lt"/>
+                <a:cs typeface="+mn-lt"/>
+              </a:rPr>
+              <a:t>), just like an Objective defines the primary business goal in our app.</a:t>
+            </a:r>
+          </a:p>
+          <a:p>
+            <a:r>
+              <a:rPr lang="en-US" sz="1600" b="1" dirty="0">
+                <a:latin typeface="Times New Roman"/>
+                <a:ea typeface="+mn-lt"/>
+                <a:cs typeface="+mn-lt"/>
+              </a:rPr>
+              <a:t>Coaches = Key Results</a:t>
+            </a:r>
+            <a:br>
+              <a:rPr lang="en-US" sz="1600" b="1" dirty="0">
+                <a:latin typeface="Times New Roman"/>
+                <a:ea typeface="+mn-lt"/>
+                <a:cs typeface="+mn-lt"/>
+              </a:rPr>
+            </a:br>
+            <a:r>
+              <a:rPr lang="en-US" sz="1600" dirty="0">
+                <a:latin typeface="Times New Roman"/>
+                <a:ea typeface="+mn-lt"/>
+                <a:cs typeface="+mn-lt"/>
+              </a:rPr>
+              <a:t>Each coach is responsible for measurable outcomes (yards per game, points allowed), which map to Key Results with clear metrics and targets.</a:t>
+            </a:r>
+          </a:p>
+          <a:p>
+            <a:r>
+              <a:rPr lang="en-US" sz="1600" b="1" dirty="0">
+                <a:latin typeface="Times New Roman"/>
+                <a:ea typeface="+mn-lt"/>
+                <a:cs typeface="+mn-lt"/>
+              </a:rPr>
+              <a:t>Plays &amp; Stats = Check-ins</a:t>
+            </a:r>
+            <a:br>
+              <a:rPr lang="en-US" sz="1600" b="1" dirty="0">
+                <a:latin typeface="Times New Roman"/>
+                <a:ea typeface="+mn-lt"/>
+                <a:cs typeface="+mn-lt"/>
+              </a:rPr>
+            </a:br>
+            <a:r>
+              <a:rPr lang="en-US" sz="1600" dirty="0">
+                <a:latin typeface="Times New Roman"/>
+                <a:ea typeface="+mn-lt"/>
+                <a:cs typeface="+mn-lt"/>
+              </a:rPr>
+              <a:t>Game-by-game stats update performance, just like check-ins update the current value of the key result.</a:t>
+            </a:r>
+          </a:p>
+          <a:p>
+            <a:r>
+              <a:rPr lang="en-US" sz="1600" b="1" dirty="0">
+                <a:latin typeface="Times New Roman"/>
+                <a:ea typeface="+mn-lt"/>
+                <a:cs typeface="+mn-lt"/>
+              </a:rPr>
+              <a:t>Progress Flows Upward</a:t>
+            </a:r>
+            <a:br>
+              <a:rPr lang="en-US" sz="1600" b="1" dirty="0">
+                <a:latin typeface="Times New Roman"/>
+                <a:ea typeface="+mn-lt"/>
+                <a:cs typeface="+mn-lt"/>
+              </a:rPr>
+            </a:br>
+            <a:r>
+              <a:rPr lang="en-US" sz="1600" dirty="0">
+                <a:latin typeface="Times New Roman"/>
+                <a:ea typeface="+mn-lt"/>
+                <a:cs typeface="+mn-lt"/>
+              </a:rPr>
+              <a:t> When stats improve, </a:t>
+            </a:r>
+            <a:r>
+              <a:rPr lang="en-US" sz="1600">
+                <a:latin typeface="Times New Roman"/>
+                <a:ea typeface="+mn-lt"/>
+                <a:cs typeface="+mn-lt"/>
+              </a:rPr>
+              <a:t>coaches'</a:t>
+            </a:r>
+            <a:r>
+              <a:rPr lang="en-US" sz="1600" dirty="0">
+                <a:latin typeface="Times New Roman"/>
+                <a:ea typeface="+mn-lt"/>
+                <a:cs typeface="+mn-lt"/>
+              </a:rPr>
+              <a:t> performance improves, and the GM’s objective progress increases.</a:t>
+            </a:r>
+            <a:br>
+              <a:rPr lang="en-US" sz="1600" dirty="0">
+                <a:latin typeface="Times New Roman"/>
+                <a:ea typeface="+mn-lt"/>
+                <a:cs typeface="+mn-lt"/>
+              </a:rPr>
+            </a:br>
+            <a:r>
+              <a:rPr lang="en-US" sz="1600" dirty="0">
+                <a:latin typeface="Times New Roman"/>
+                <a:ea typeface="+mn-lt"/>
+                <a:cs typeface="+mn-lt"/>
+              </a:rPr>
+              <a:t> In our app, Key Result progress is calculated and rolled up to update Objective completion automatically.</a:t>
+            </a:r>
+          </a:p>
+          <a:p>
+            <a:r>
+              <a:rPr lang="en-US" sz="1600" b="1" dirty="0">
+                <a:latin typeface="Times New Roman"/>
+                <a:ea typeface="+mn-lt"/>
+                <a:cs typeface="+mn-lt"/>
+              </a:rPr>
+              <a:t>Local, Single-User System</a:t>
+            </a:r>
+            <a:br>
+              <a:rPr lang="en-US" sz="1600" b="1" dirty="0">
+                <a:latin typeface="Times New Roman"/>
+                <a:ea typeface="+mn-lt"/>
+                <a:cs typeface="+mn-lt"/>
+              </a:rPr>
+            </a:br>
+            <a:r>
+              <a:rPr lang="en-US" sz="1600" dirty="0">
+                <a:latin typeface="Times New Roman"/>
+                <a:ea typeface="+mn-lt"/>
+                <a:cs typeface="+mn-lt"/>
+              </a:rPr>
+              <a:t>All data is tracked by one “GM” (the admin) in a single-user, offline application, with logic handled locally in the database and code.</a:t>
+            </a:r>
+          </a:p>
+          <a:p>
+            <a:endParaRPr lang="en-US" sz="1600">
+              <a:latin typeface="Times New Roman"/>
+              <a:cs typeface="Times New Roman"/>
+            </a:endParaRPr>
+          </a:p>
+        </p:txBody>
+      </p:sp>
+    </p:spTree>
+    <p:extLst>
+      <p:ext uri="{BB962C8B-B14F-4D97-AF65-F5344CB8AC3E}">
+        <p14:creationId xmlns:p14="http://schemas.microsoft.com/office/powerpoint/2010/main" val="108470674"/>
+      </p:ext>
+    </p:extLst>
+  </p:cSld>
+  <p:clrMapOvr>
+    <a:masterClrMapping/>
+  </p:clrMapOvr>
+</p:sld>
+</file>
+
 <file path=ppt/theme/theme1.xml><?xml version="1.0" encoding="utf-8"?>
 <a:theme xmlns:a="http://schemas.openxmlformats.org/drawingml/2006/main" name="office theme">
   <a:themeElements>
